--- a/Slide_HaDuyAnh.pptx
+++ b/Slide_HaDuyAnh.pptx
@@ -27,11 +27,11 @@
   <p:notesSz cx="6858000" cy="9144000"/>
   <p:embeddedFontLst>
     <p:embeddedFont>
-      <p:font typeface="Abadi" charset="0"/>
+      <p:font typeface="Abadi" panose="020B0604020202020204" charset="0"/>
       <p:regular r:id="rId17"/>
     </p:embeddedFont>
     <p:embeddedFont>
-      <p:font typeface="Calibri" pitchFamily="34" charset="0"/>
+      <p:font typeface="Calibri" panose="020F0502020204030204" pitchFamily="34" charset="0"/>
       <p:regular r:id="rId18"/>
       <p:bold r:id="rId19"/>
       <p:italic r:id="rId20"/>
@@ -269,7 +269,7 @@
   </p:defaultTextStyle>
   <p:extLst>
     <p:ext uri="{EFAFB233-063F-42B5-8137-9DF3F51BA10A}">
-      <p15:sldGuideLst xmlns:p15="http://schemas.microsoft.com/office/powerpoint/2012/main" xmlns="">
+      <p15:sldGuideLst xmlns:p15="http://schemas.microsoft.com/office/powerpoint/2012/main">
         <p15:guide id="1" orient="horz" pos="2160">
           <p15:clr>
             <a:srgbClr val="A4A3A4"/>
@@ -283,7 +283,7 @@
       </p15:sldGuideLst>
     </p:ext>
     <p:ext uri="http://customooxmlschemas.google.com/">
-      <go:slidesCustomData xmlns:go="http://customooxmlschemas.google.com/" xmlns:ahyp="http://schemas.microsoft.com/office/drawing/2018/hyperlinkcolor" xmlns:p15="http://schemas.microsoft.com/office/powerpoint/2012/main" xmlns:p14="http://schemas.microsoft.com/office/powerpoint/2010/main" xmlns:com="http://schemas.openxmlformats.org/drawingml/2006/compatibility" xmlns:pvml="urn:schemas-microsoft-com:office:powerpoint" xmlns:v="urn:schemas-microsoft-com:vml" xmlns:o="urn:schemas-microsoft-com:office:office" xmlns:dgm="http://schemas.openxmlformats.org/drawingml/2006/diagram" xmlns:c="http://schemas.openxmlformats.org/drawingml/2006/chart" xmlns:mv="urn:schemas-microsoft-com:mac:vml" xmlns:mc="http://schemas.openxmlformats.org/markup-compatibility/2006" xmlns="" r:id="rId33" roundtripDataSignature="AMtx7mi0T3Lsz+s+w+NVwy2QJQHamJzxyA=="/>
+      <go:slidesCustomData xmlns="" xmlns:mc="http://schemas.openxmlformats.org/markup-compatibility/2006" xmlns:mv="urn:schemas-microsoft-com:mac:vml" xmlns:c="http://schemas.openxmlformats.org/drawingml/2006/chart" xmlns:dgm="http://schemas.openxmlformats.org/drawingml/2006/diagram" xmlns:o="urn:schemas-microsoft-com:office:office" xmlns:v="urn:schemas-microsoft-com:vml" xmlns:pvml="urn:schemas-microsoft-com:office:powerpoint" xmlns:com="http://schemas.openxmlformats.org/drawingml/2006/compatibility" xmlns:p14="http://schemas.microsoft.com/office/powerpoint/2010/main" xmlns:p15="http://schemas.microsoft.com/office/powerpoint/2012/main" xmlns:ahyp="http://schemas.microsoft.com/office/drawing/2018/hyperlinkcolor" xmlns:go="http://customooxmlschemas.google.com/" r:id="rId33" roundtripDataSignature="AMtx7mi0T3Lsz+s+w+NVwy2QJQHamJzxyA=="/>
     </p:ext>
   </p:extLst>
 </p:presentation>
@@ -14932,7 +14932,7 @@
           <p:cNvPr id="5" name="Table 1">
             <a:extLst>
               <a:ext uri="{FF2B5EF4-FFF2-40B4-BE49-F238E27FC236}">
-                <a16:creationId xmlns:a16="http://schemas.microsoft.com/office/drawing/2014/main" xmlns="" id="{ADC1A442-E890-42F6-BC68-7A7A079ECEE4}"/>
+                <a16:creationId xmlns:a16="http://schemas.microsoft.com/office/drawing/2014/main" id="{ADC1A442-E890-42F6-BC68-7A7A079ECEE4}"/>
               </a:ext>
             </a:extLst>
           </p:cNvPr>
@@ -14961,14 +14961,14 @@
                 <a:gridCol w="2453736">
                   <a:extLst>
                     <a:ext uri="{9D8B030D-6E8A-4147-A177-3AD203B41FA5}">
-                      <a16:colId xmlns:a16="http://schemas.microsoft.com/office/drawing/2014/main" xmlns="" val="3573213716"/>
+                      <a16:colId xmlns:a16="http://schemas.microsoft.com/office/drawing/2014/main" val="3573213716"/>
                     </a:ext>
                   </a:extLst>
                 </a:gridCol>
                 <a:gridCol w="3666227">
                   <a:extLst>
                     <a:ext uri="{9D8B030D-6E8A-4147-A177-3AD203B41FA5}">
-                      <a16:colId xmlns:a16="http://schemas.microsoft.com/office/drawing/2014/main" xmlns="" val="2206966197"/>
+                      <a16:colId xmlns:a16="http://schemas.microsoft.com/office/drawing/2014/main" val="2206966197"/>
                     </a:ext>
                   </a:extLst>
                 </a:gridCol>
@@ -15038,7 +15038,7 @@
                 </a:tc>
                 <a:extLst>
                   <a:ext uri="{0D108BD9-81ED-4DB2-BD59-A6C34878D82A}">
-                    <a16:rowId xmlns:a16="http://schemas.microsoft.com/office/drawing/2014/main" xmlns="" val="3374429282"/>
+                    <a16:rowId xmlns:a16="http://schemas.microsoft.com/office/drawing/2014/main" val="3374429282"/>
                   </a:ext>
                 </a:extLst>
               </a:tr>
@@ -15155,7 +15155,7 @@
                 </a:tc>
                 <a:extLst>
                   <a:ext uri="{0D108BD9-81ED-4DB2-BD59-A6C34878D82A}">
-                    <a16:rowId xmlns:a16="http://schemas.microsoft.com/office/drawing/2014/main" xmlns="" val="320453327"/>
+                    <a16:rowId xmlns:a16="http://schemas.microsoft.com/office/drawing/2014/main" val="320453327"/>
                   </a:ext>
                 </a:extLst>
               </a:tr>
@@ -15224,7 +15224,7 @@
                 </a:tc>
                 <a:extLst>
                   <a:ext uri="{0D108BD9-81ED-4DB2-BD59-A6C34878D82A}">
-                    <a16:rowId xmlns:a16="http://schemas.microsoft.com/office/drawing/2014/main" xmlns="" val="500186733"/>
+                    <a16:rowId xmlns:a16="http://schemas.microsoft.com/office/drawing/2014/main" val="500186733"/>
                   </a:ext>
                 </a:extLst>
               </a:tr>
@@ -15305,7 +15305,7 @@
                 </a:tc>
                 <a:extLst>
                   <a:ext uri="{0D108BD9-81ED-4DB2-BD59-A6C34878D82A}">
-                    <a16:rowId xmlns:a16="http://schemas.microsoft.com/office/drawing/2014/main" xmlns="" val="2790633521"/>
+                    <a16:rowId xmlns:a16="http://schemas.microsoft.com/office/drawing/2014/main" val="2790633521"/>
                   </a:ext>
                 </a:extLst>
               </a:tr>
@@ -16534,7 +16534,35 @@
                 <a:latin typeface="Times New Roman" panose="02020603050405020304" pitchFamily="18" charset="0"/>
                 <a:cs typeface="Times New Roman" panose="02020603050405020304" pitchFamily="18" charset="0"/>
               </a:rPr>
-              <a:t>Các thông tin quan trọng của người dùng trên Website như mật khẩu đề được mã hoá một chiều để tránh làm lộ dữ liệu.</a:t>
+              <a:t>Các thông tin quan trọng của người dùng trên Website như mật khẩu </a:t>
+            </a:r>
+            <a:r>
+              <a:rPr lang="vi-VN" sz="1800" dirty="0" smtClean="0">
+                <a:latin typeface="Times New Roman" panose="02020603050405020304" pitchFamily="18" charset="0"/>
+                <a:cs typeface="Times New Roman" panose="02020603050405020304" pitchFamily="18" charset="0"/>
+              </a:rPr>
+              <a:t>đề</a:t>
+            </a:r>
+            <a:r>
+              <a:rPr lang="en-US" sz="1800" dirty="0" smtClean="0">
+                <a:latin typeface="Times New Roman" panose="02020603050405020304" pitchFamily="18" charset="0"/>
+                <a:cs typeface="Times New Roman" panose="02020603050405020304" pitchFamily="18" charset="0"/>
+              </a:rPr>
+              <a:t>u</a:t>
+            </a:r>
+            <a:r>
+              <a:rPr lang="vi-VN" sz="1800" dirty="0" smtClean="0">
+                <a:latin typeface="Times New Roman" panose="02020603050405020304" pitchFamily="18" charset="0"/>
+                <a:cs typeface="Times New Roman" panose="02020603050405020304" pitchFamily="18" charset="0"/>
+              </a:rPr>
+              <a:t> </a:t>
+            </a:r>
+            <a:r>
+              <a:rPr lang="vi-VN" sz="1800" dirty="0" smtClean="0">
+                <a:latin typeface="Times New Roman" panose="02020603050405020304" pitchFamily="18" charset="0"/>
+                <a:cs typeface="Times New Roman" panose="02020603050405020304" pitchFamily="18" charset="0"/>
+              </a:rPr>
+              <a:t>được mã hoá một chiều để tránh làm lộ dữ liệu.</a:t>
             </a:r>
             <a:endParaRPr lang="en-US" sz="1800" dirty="0" smtClean="0">
               <a:latin typeface="Abadi" panose="020B0604020104020204" pitchFamily="34" charset="0"/>
@@ -18217,7 +18245,7 @@
           <p:cNvPr id="7" name="Picture 6">
             <a:extLst>
               <a:ext uri="{FF2B5EF4-FFF2-40B4-BE49-F238E27FC236}">
-                <a16:creationId xmlns:a16="http://schemas.microsoft.com/office/drawing/2014/main" xmlns="" id="{E7FA6A91-D49A-E8CE-2AC8-C38BFD8A54A5}"/>
+                <a16:creationId xmlns:a16="http://schemas.microsoft.com/office/drawing/2014/main" id="{E7FA6A91-D49A-E8CE-2AC8-C38BFD8A54A5}"/>
               </a:ext>
             </a:extLst>
           </p:cNvPr>
@@ -18253,7 +18281,7 @@
           <p:cNvPr id="8" name="Picture 7">
             <a:extLst>
               <a:ext uri="{FF2B5EF4-FFF2-40B4-BE49-F238E27FC236}">
-                <a16:creationId xmlns:a16="http://schemas.microsoft.com/office/drawing/2014/main" xmlns="" id="{B9BC3EBC-5209-CD03-48F8-CC2687CEF7E5}"/>
+                <a16:creationId xmlns:a16="http://schemas.microsoft.com/office/drawing/2014/main" id="{B9BC3EBC-5209-CD03-48F8-CC2687CEF7E5}"/>
               </a:ext>
             </a:extLst>
           </p:cNvPr>
@@ -19719,7 +19747,7 @@
                 <a:latin typeface="+mj-lt"/>
                 <a:cs typeface="Times New Roman" panose="02020603050405020304" pitchFamily="18" charset="0"/>
               </a:rPr>
-              <a:t>giã</a:t>
+              <a:t>rã</a:t>
             </a:r>
             <a:r>
               <a:rPr lang="en-US" sz="2000" b="1" dirty="0" smtClean="0">
